--- a/decks/combined-bonding/combined-bonding_ch6_metals-and-alloys.pptx
+++ b/decks/combined-bonding/combined-bonding_ch6_metals-and-alloys.pptx
@@ -128,30 +128,30 @@
   <p:extLst>
     <p:ext uri="{521415D9-36F7-43E2-AB2F-B90AF26B5E84}">
       <p14:sectionLst xmlns:p14="http://schemas.microsoft.com/office/powerpoint/2010/main">
-        <p14:section name="Opening" id="{6125ee05-ba97-c10d-1fbc-4354295a5064}">
+        <p14:section name="Opening" id="{08c527cf-6337-1541-85b0-f0a30ace8de8}">
           <p14:sldIdLst>
             <p14:sldId id="256"/>
           </p14:sldIdLst>
         </p14:section>
-        <p14:section name="Gate" id="{72e2d309-d78e-1f8a-a7ee-d9f1e10c54e5}">
+        <p14:section name="Gate" id="{a625e2f1-9a4c-72ac-f391-4dceb289e5ee}">
           <p14:sldIdLst>
             <p14:sldId id="257"/>
             <p14:sldId id="258"/>
           </p14:sldIdLst>
         </p14:section>
-        <p14:section name="Pre-teach" id="{9e4ddb89-a185-62e1-6517-e4cfa93b97dd}">
+        <p14:section name="Pre-teach" id="{56943a89-6e08-f9c9-9179-1810b6d0caf4}">
           <p14:sldIdLst>
             <p14:sldId id="259"/>
             <p14:sldId id="260"/>
           </p14:sldIdLst>
         </p14:section>
-        <p14:section name="Read-along" id="{c375df58-2af6-e728-2272-21e4f4caaf42}">
+        <p14:section name="Read-along" id="{1464c1ee-1596-6831-0cf5-c6cbca1dfc1d}">
           <p14:sldIdLst>
             <p14:sldId id="261"/>
             <p14:sldId id="262"/>
           </p14:sldIdLst>
         </p14:section>
-        <p14:section name="Teach" id="{0af216a7-32cd-2b12-4fc6-2b455af6a296}">
+        <p14:section name="Teach" id="{e402ad6f-90f7-7cc6-6eec-f2edb319681a}">
           <p14:sldIdLst>
             <p14:sldId id="263"/>
             <p14:sldId id="264"/>
@@ -163,19 +163,19 @@
             <p14:sldId id="270"/>
           </p14:sldIdLst>
         </p14:section>
-        <p14:section name="Routes" id="{2bfc8e3a-dd87-0000-c0ce-4089eac87431}">
+        <p14:section name="Routes" id="{0a7f4e32-eba0-b9d5-0940-61401d87d779}">
           <p14:sldIdLst>
             <p14:sldId id="271"/>
             <p14:sldId id="272"/>
             <p14:sldId id="273"/>
           </p14:sldIdLst>
         </p14:section>
-        <p14:section name="Close" id="{d5ca4241-a193-4ba4-6c40-1198b7d20bed}">
+        <p14:section name="Close" id="{894818e0-c807-83d3-f150-4aa785f7c086}">
           <p14:sldIdLst>
             <p14:sldId id="274"/>
           </p14:sldIdLst>
         </p14:section>
-        <p14:section name="Answers" id="{67cf8ca4-45b2-67c3-1d74-39c33999d32a}">
+        <p14:section name="Answers" id="{543d9690-19bb-6687-b205-e7ccaa733eba}">
           <p14:sldIdLst>
             <p14:sldId id="275"/>
             <p14:sldId id="276"/>
@@ -1608,7 +1608,7 @@
             <a:r>
               <a:rPr lang="en-US" dirty="0"/>
               <a:t>Do now — retrieval. Silent, no notes, no help: recall comes before any support. Give about four minutes.
-1. What is metallic bonding?  →  A   The attraction between positive metal ions and a sea of delocalised electrons
+1. What is metallic bonding?  →  C   The attraction between positive metal ions and a sea of delocalised electrons
 2. Metals can be bent and shaped because the layers of ions can ___ over each other.  →  slide
 3. What is an alloy?  →  A   A mixture of a metal with one or more other elements
 Circulate: who gets 3/3 (Stretch route), 2/3 (Core), 0–1 (Support)? Use this to route pupils later in the lesson.</a:t>
@@ -1975,7 +1975,7 @@
             <a:r>
               <a:rPr lang="en-US" dirty="0"/>
               <a:t>Answers — pupils mark their own in a different colour, then hands up for 3/3, 2/3, 1/3.
-1. A   The attraction between positive metal ions and a sea of delocalised electrons. In a metal the outer electrons are delocalised. The strong attraction between the positive ions left behind and those electrons is metallic bonding.
+1. C   The attraction between positive metal ions and a sea of delocalised electrons. In a metal the outer electrons are delocalised. The strong attraction between the positive ions left behind and those electrons is metallic bonding.
 2. slide. The regular layers of ions in a pure metal slide over one another, so the metal changes shape without breaking.
 3. A   A mixture of a metal with one or more other elements. An alloy is a mixture, not a compound: a metal with other elements mixed in, such as iron with carbon in steel.
 Say the route each score points to: 3/3 Stretch, 2/3 Core, 0–1 Support. Pupils may choose to move up.</a:t>
@@ -8949,7 +8949,7 @@
                 <a:ea typeface="Calibri" pitchFamily="34" charset="-122"/>
                 <a:cs typeface="Calibri" pitchFamily="34" charset="-120"/>
               </a:rPr>
-              <a:t>The layers of ions slide and carry the current along</a:t>
+              <a:t>Metals contain molecules that pass electrons from one to the next</a:t>
             </a:r>
             <a:endParaRPr lang="en-US" sz="2600" dirty="0"/>
           </a:p>
@@ -8986,7 +8986,7 @@
                 <a:ea typeface="Calibri" pitchFamily="34" charset="-122"/>
                 <a:cs typeface="Calibri" pitchFamily="34" charset="-120"/>
               </a:rPr>
-              <a:t>Metals contain molecules that pass electrons from one to the next</a:t>
+              <a:t>The layers of ions slide and carry the current along</a:t>
             </a:r>
             <a:endParaRPr lang="en-US" sz="2600" dirty="0"/>
           </a:p>
@@ -11804,7 +11804,7 @@
                 <a:ea typeface="Calibri" pitchFamily="34" charset="-122"/>
                 <a:cs typeface="Calibri" pitchFamily="34" charset="-120"/>
               </a:rPr>
-              <a:t>The attraction between positive metal ions and a sea of delocalised electrons</a:t>
+              <a:t>Weak forces between layers of metal atoms</a:t>
             </a:r>
             <a:endParaRPr lang="en-US" sz="1800" dirty="0"/>
           </a:p>
@@ -11841,7 +11841,7 @@
                 <a:ea typeface="Calibri" pitchFamily="34" charset="-122"/>
                 <a:cs typeface="Calibri" pitchFamily="34" charset="-120"/>
               </a:rPr>
-              <a:t>The sharing of pairs of electrons between metal atoms</a:t>
+              <a:t>The transfer of electrons from a metal atom to a non-metal atom</a:t>
             </a:r>
             <a:endParaRPr lang="en-US" sz="1800" dirty="0"/>
           </a:p>
@@ -11878,7 +11878,7 @@
                 <a:ea typeface="Calibri" pitchFamily="34" charset="-122"/>
                 <a:cs typeface="Calibri" pitchFamily="34" charset="-120"/>
               </a:rPr>
-              <a:t>The transfer of electrons from a metal atom to a non-metal atom</a:t>
+              <a:t>The attraction between positive metal ions and a sea of delocalised electrons</a:t>
             </a:r>
             <a:endParaRPr lang="en-US" sz="1800" dirty="0"/>
           </a:p>
@@ -11915,7 +11915,7 @@
                 <a:ea typeface="Calibri" pitchFamily="34" charset="-122"/>
                 <a:cs typeface="Calibri" pitchFamily="34" charset="-120"/>
               </a:rPr>
-              <a:t>Weak forces between layers of metal atoms</a:t>
+              <a:t>The sharing of pairs of electrons between metal atoms</a:t>
             </a:r>
             <a:endParaRPr lang="en-US" sz="1800" dirty="0"/>
           </a:p>
@@ -12354,7 +12354,7 @@
                 <a:ea typeface="Calibri" pitchFamily="34" charset="-122"/>
                 <a:cs typeface="Calibri" pitchFamily="34" charset="-120"/>
               </a:rPr>
-              <a:t>A compound of two metals joined by covalent bonds</a:t>
+              <a:t>A pure metal that has been heated and cooled</a:t>
             </a:r>
             <a:endParaRPr lang="en-US" sz="2200" dirty="0"/>
           </a:p>
@@ -12391,7 +12391,7 @@
                 <a:ea typeface="Calibri" pitchFamily="34" charset="-122"/>
                 <a:cs typeface="Calibri" pitchFamily="34" charset="-120"/>
               </a:rPr>
-              <a:t>A pure metal that has been heated and cooled</a:t>
+              <a:t>A metal coated in a layer of plastic</a:t>
             </a:r>
             <a:endParaRPr lang="en-US" sz="2200" dirty="0"/>
           </a:p>
@@ -12428,7 +12428,7 @@
                 <a:ea typeface="Calibri" pitchFamily="34" charset="-122"/>
                 <a:cs typeface="Calibri" pitchFamily="34" charset="-120"/>
               </a:rPr>
-              <a:t>A metal coated in a layer of plastic</a:t>
+              <a:t>A compound of two metals joined by covalent bonds</a:t>
             </a:r>
             <a:endParaRPr lang="en-US" sz="2200" dirty="0"/>
           </a:p>
@@ -14363,7 +14363,7 @@
                 <a:ea typeface="Calibri" pitchFamily="34" charset="-122"/>
                 <a:cs typeface="Calibri" pitchFamily="34" charset="-120"/>
               </a:rPr>
-              <a:t>A   The attraction between positive metal ions and a sea of delocalised electrons</a:t>
+              <a:t>C   The attraction between positive metal ions and a sea of delocalised electrons</a:t>
             </a:r>
             <a:endParaRPr lang="en-US" sz="2200" dirty="0"/>
           </a:p>

--- a/decks/combined-bonding/combined-bonding_ch6_metals-and-alloys.pptx
+++ b/decks/combined-bonding/combined-bonding_ch6_metals-and-alloys.pptx
@@ -128,30 +128,30 @@
   <p:extLst>
     <p:ext uri="{521415D9-36F7-43E2-AB2F-B90AF26B5E84}">
       <p14:sectionLst xmlns:p14="http://schemas.microsoft.com/office/powerpoint/2010/main">
-        <p14:section name="Opening" id="{08c527cf-6337-1541-85b0-f0a30ace8de8}">
+        <p14:section name="Opening" id="{ce504c6d-e3a1-8a4c-63e2-09dcac802fba}">
           <p14:sldIdLst>
             <p14:sldId id="256"/>
           </p14:sldIdLst>
         </p14:section>
-        <p14:section name="Gate" id="{a625e2f1-9a4c-72ac-f391-4dceb289e5ee}">
+        <p14:section name="Gate" id="{d3d03239-d354-e286-7527-14ed641fa967}">
           <p14:sldIdLst>
             <p14:sldId id="257"/>
             <p14:sldId id="258"/>
           </p14:sldIdLst>
         </p14:section>
-        <p14:section name="Pre-teach" id="{56943a89-6e08-f9c9-9179-1810b6d0caf4}">
+        <p14:section name="Pre-teach" id="{18d0f99b-5682-8d11-1bee-c75048d6aaf3}">
           <p14:sldIdLst>
             <p14:sldId id="259"/>
             <p14:sldId id="260"/>
           </p14:sldIdLst>
         </p14:section>
-        <p14:section name="Read-along" id="{1464c1ee-1596-6831-0cf5-c6cbca1dfc1d}">
+        <p14:section name="Read-along" id="{ecc44982-4681-729c-4ccd-61e6d1c21481}">
           <p14:sldIdLst>
             <p14:sldId id="261"/>
             <p14:sldId id="262"/>
           </p14:sldIdLst>
         </p14:section>
-        <p14:section name="Teach" id="{e402ad6f-90f7-7cc6-6eec-f2edb319681a}">
+        <p14:section name="Teach" id="{bf9af712-8a16-2f61-e270-2af35c203078}">
           <p14:sldIdLst>
             <p14:sldId id="263"/>
             <p14:sldId id="264"/>
@@ -163,19 +163,19 @@
             <p14:sldId id="270"/>
           </p14:sldIdLst>
         </p14:section>
-        <p14:section name="Routes" id="{0a7f4e32-eba0-b9d5-0940-61401d87d779}">
+        <p14:section name="Routes" id="{f96919b8-d231-d1aa-5a1c-a3a3fa38c890}">
           <p14:sldIdLst>
             <p14:sldId id="271"/>
             <p14:sldId id="272"/>
             <p14:sldId id="273"/>
           </p14:sldIdLst>
         </p14:section>
-        <p14:section name="Close" id="{894818e0-c807-83d3-f150-4aa785f7c086}">
+        <p14:section name="Close" id="{fc0d9aa3-330c-f073-13e4-e7eca99ad0e0}">
           <p14:sldIdLst>
             <p14:sldId id="274"/>
           </p14:sldIdLst>
         </p14:section>
-        <p14:section name="Answers" id="{543d9690-19bb-6687-b205-e7ccaa733eba}">
+        <p14:section name="Answers" id="{38672d49-7bba-dcc2-d4a2-d29997a165d9}">
           <p14:sldIdLst>
             <p14:sldId id="275"/>
             <p14:sldId id="276"/>
